--- a/3-Master_Plan/re_entry/HEROs_and_PASSes/slides/auto/CHAR_empirical_lc_distributions_AUTO.pptx
+++ b/3-Master_Plan/re_entry/HEROs_and_PASSes/slides/auto/CHAR_empirical_lc_distributions_AUTO.pptx
@@ -303,7 +303,7 @@
           <a:p>
             <a:fld id="{5BCAD085-E8A6-8845-BD4E-CB4CCA059FC4}" type="datetimeFigureOut">
               <a:rPr lang="en-US" smtClean="0"/>
-              <a:t>8/6/26</a:t>
+              <a:t>8/11/26</a:t>
             </a:fld>
             <a:endParaRPr lang="en-US"/>
           </a:p>
@@ -471,7 +471,7 @@
           <a:p>
             <a:fld id="{5BCAD085-E8A6-8845-BD4E-CB4CCA059FC4}" type="datetimeFigureOut">
               <a:rPr lang="en-US" smtClean="0"/>
-              <a:t>8/6/26</a:t>
+              <a:t>8/11/26</a:t>
             </a:fld>
             <a:endParaRPr lang="en-US"/>
           </a:p>
@@ -649,7 +649,7 @@
           <a:p>
             <a:fld id="{5BCAD085-E8A6-8845-BD4E-CB4CCA059FC4}" type="datetimeFigureOut">
               <a:rPr lang="en-US" smtClean="0"/>
-              <a:t>8/6/26</a:t>
+              <a:t>8/11/26</a:t>
             </a:fld>
             <a:endParaRPr lang="en-US"/>
           </a:p>
@@ -817,7 +817,7 @@
           <a:p>
             <a:fld id="{5BCAD085-E8A6-8845-BD4E-CB4CCA059FC4}" type="datetimeFigureOut">
               <a:rPr lang="en-US" smtClean="0"/>
-              <a:t>8/6/26</a:t>
+              <a:t>8/11/26</a:t>
             </a:fld>
             <a:endParaRPr lang="en-US"/>
           </a:p>
@@ -1062,7 +1062,7 @@
           <a:p>
             <a:fld id="{5BCAD085-E8A6-8845-BD4E-CB4CCA059FC4}" type="datetimeFigureOut">
               <a:rPr lang="en-US" smtClean="0"/>
-              <a:t>8/6/26</a:t>
+              <a:t>8/11/26</a:t>
             </a:fld>
             <a:endParaRPr lang="en-US"/>
           </a:p>
@@ -1347,7 +1347,7 @@
           <a:p>
             <a:fld id="{5BCAD085-E8A6-8845-BD4E-CB4CCA059FC4}" type="datetimeFigureOut">
               <a:rPr lang="en-US" smtClean="0"/>
-              <a:t>8/6/26</a:t>
+              <a:t>8/11/26</a:t>
             </a:fld>
             <a:endParaRPr lang="en-US"/>
           </a:p>
@@ -1766,7 +1766,7 @@
           <a:p>
             <a:fld id="{5BCAD085-E8A6-8845-BD4E-CB4CCA059FC4}" type="datetimeFigureOut">
               <a:rPr lang="en-US" smtClean="0"/>
-              <a:t>8/6/26</a:t>
+              <a:t>8/11/26</a:t>
             </a:fld>
             <a:endParaRPr lang="en-US"/>
           </a:p>
@@ -1883,7 +1883,7 @@
           <a:p>
             <a:fld id="{5BCAD085-E8A6-8845-BD4E-CB4CCA059FC4}" type="datetimeFigureOut">
               <a:rPr lang="en-US" smtClean="0"/>
-              <a:t>8/6/26</a:t>
+              <a:t>8/11/26</a:t>
             </a:fld>
             <a:endParaRPr lang="en-US"/>
           </a:p>
@@ -1978,7 +1978,7 @@
           <a:p>
             <a:fld id="{5BCAD085-E8A6-8845-BD4E-CB4CCA059FC4}" type="datetimeFigureOut">
               <a:rPr lang="en-US" smtClean="0"/>
-              <a:t>8/6/26</a:t>
+              <a:t>8/11/26</a:t>
             </a:fld>
             <a:endParaRPr lang="en-US"/>
           </a:p>
@@ -2253,7 +2253,7 @@
           <a:p>
             <a:fld id="{5BCAD085-E8A6-8845-BD4E-CB4CCA059FC4}" type="datetimeFigureOut">
               <a:rPr lang="en-US" smtClean="0"/>
-              <a:t>8/6/26</a:t>
+              <a:t>8/11/26</a:t>
             </a:fld>
             <a:endParaRPr lang="en-US"/>
           </a:p>
@@ -2505,7 +2505,7 @@
           <a:p>
             <a:fld id="{5BCAD085-E8A6-8845-BD4E-CB4CCA059FC4}" type="datetimeFigureOut">
               <a:rPr lang="en-US" smtClean="0"/>
-              <a:t>8/6/26</a:t>
+              <a:t>8/11/26</a:t>
             </a:fld>
             <a:endParaRPr lang="en-US"/>
           </a:p>
@@ -2716,7 +2716,7 @@
           <a:p>
             <a:fld id="{5BCAD085-E8A6-8845-BD4E-CB4CCA059FC4}" type="datetimeFigureOut">
               <a:rPr lang="en-US" smtClean="0"/>
-              <a:t>8/6/26</a:t>
+              <a:t>8/11/26</a:t>
             </a:fld>
             <a:endParaRPr lang="en-US"/>
           </a:p>
@@ -3091,8 +3091,8 @@
           <a:chExt cx="0" cy="0"/>
         </a:xfrm>
       </p:grpSpPr>
-      <mc:AlternateContent xmlns:mc="http://schemas.openxmlformats.org/markup-compatibility/2006">
-        <mc:Choice xmlns:a14="http://schemas.microsoft.com/office/drawing/2010/main" Requires="a14">
+      <mc:AlternateContent xmlns:mc="http://schemas.openxmlformats.org/markup-compatibility/2006" xmlns:a14="http://schemas.microsoft.com/office/drawing/2010/main">
+        <mc:Choice Requires="a14">
           <p:sp>
             <p:nvSpPr>
               <p:cNvPr id="2" name="TextBox 1"/>
@@ -3126,7 +3126,7 @@
                     <m:sSub>
                       <m:sSubPr>
                         <m:ctrlPr>
-                          <a:rPr lang="en-US" sz="2000" b="1" i="0" baseline="0" dirty="0" smtClean="0">
+                          <a:rPr lang="en-US" sz="2000" b="1" i="0" baseline="0" dirty="0">
                             <a:latin typeface="Cambria Math" panose="02040503050406030204" pitchFamily="18" charset="0"/>
                           </a:rPr>
                         </m:ctrlPr>
@@ -3160,7 +3160,7 @@
             </p:txBody>
           </p:sp>
         </mc:Choice>
-        <mc:Fallback>
+        <mc:Fallback xmlns="">
           <p:sp>
             <p:nvSpPr>
               <p:cNvPr id="2" name="TextBox 1"/>
@@ -3199,8 +3199,8 @@
           </p:sp>
         </mc:Fallback>
       </mc:AlternateContent>
-      <mc:AlternateContent xmlns:mc="http://schemas.openxmlformats.org/markup-compatibility/2006">
-        <mc:Choice xmlns:a14="http://schemas.microsoft.com/office/drawing/2010/main" Requires="a14">
+      <mc:AlternateContent xmlns:mc="http://schemas.openxmlformats.org/markup-compatibility/2006" xmlns:a14="http://schemas.microsoft.com/office/drawing/2010/main">
+        <mc:Choice Requires="a14">
           <p:sp>
             <p:nvSpPr>
               <p:cNvPr id="3" name="TextBox 2"/>
@@ -3234,7 +3234,7 @@
                     <m:sSub>
                       <m:sSubPr>
                         <m:ctrlPr>
-                          <a:rPr lang="en-US" sz="1000" b="0" i="0" baseline="0" dirty="0" smtClean="0">
+                          <a:rPr lang="en-US" sz="1000" b="0" i="0" baseline="0" dirty="0">
                             <a:latin typeface="Cambria Math" panose="02040503050406030204" pitchFamily="18" charset="0"/>
                           </a:rPr>
                         </m:ctrlPr>
@@ -3439,7 +3439,7 @@
             </p:txBody>
           </p:sp>
         </mc:Choice>
-        <mc:Fallback>
+        <mc:Fallback xmlns="">
           <p:sp>
             <p:nvSpPr>
               <p:cNvPr id="3" name="TextBox 2"/>
@@ -3478,8 +3478,8 @@
           </p:sp>
         </mc:Fallback>
       </mc:AlternateContent>
-      <mc:AlternateContent xmlns:mc="http://schemas.openxmlformats.org/markup-compatibility/2006">
-        <mc:Choice xmlns:a14="http://schemas.microsoft.com/office/drawing/2010/main" Requires="a14">
+      <mc:AlternateContent xmlns:mc="http://schemas.openxmlformats.org/markup-compatibility/2006" xmlns:a14="http://schemas.microsoft.com/office/drawing/2010/main">
+        <mc:Choice Requires="a14">
           <p:sp>
             <p:nvSpPr>
               <p:cNvPr id="4" name="TextBox 3"/>
@@ -3608,7 +3608,7 @@
                         <m:d>
                           <m:dPr>
                             <m:ctrlPr>
-                              <a:rPr lang="en-US" sz="1000" b="0" i="0" baseline="0" dirty="0" smtClean="0">
+                              <a:rPr lang="en-US" sz="1000" b="0" i="1" baseline="0" dirty="0" smtClean="0">
                                 <a:latin typeface="Cambria Math" panose="02040503050406030204" pitchFamily="18" charset="0"/>
                               </a:rPr>
                             </m:ctrlPr>
@@ -3617,7 +3617,7 @@
                             <m:sSub>
                               <m:sSubPr>
                                 <m:ctrlPr>
-                                  <a:rPr lang="en-US" sz="1000" b="0" i="0" baseline="0" dirty="0" smtClean="0">
+                                  <a:rPr lang="en-US" sz="1000" b="0" i="1" baseline="0" dirty="0" smtClean="0">
                                     <a:latin typeface="Cambria Math" panose="02040503050406030204" pitchFamily="18" charset="0"/>
                                   </a:rPr>
                                 </m:ctrlPr>
@@ -3790,7 +3790,7 @@
                     <m:sSub>
                       <m:sSubPr>
                         <m:ctrlPr>
-                          <a:rPr lang="en-US" sz="1000" b="0" i="0" baseline="0" dirty="0" smtClean="0">
+                          <a:rPr lang="en-US" sz="1000" b="0" i="0" baseline="0" dirty="0">
                             <a:latin typeface="Cambria Math" panose="02040503050406030204" pitchFamily="18" charset="0"/>
                           </a:rPr>
                         </m:ctrlPr>
@@ -3939,7 +3939,7 @@
                     <m:sSub>
                       <m:sSubPr>
                         <m:ctrlPr>
-                          <a:rPr lang="en-US" sz="1000" b="0" i="0" baseline="0" dirty="0" smtClean="0">
+                          <a:rPr lang="en-US" sz="1000" b="0" i="1" baseline="0" dirty="0">
                             <a:latin typeface="Cambria Math" panose="02040503050406030204" pitchFamily="18" charset="0"/>
                           </a:rPr>
                         </m:ctrlPr>
@@ -3985,7 +3985,7 @@
             </p:txBody>
           </p:sp>
         </mc:Choice>
-        <mc:Fallback>
+        <mc:Fallback xmlns="">
           <p:sp>
             <p:nvSpPr>
               <p:cNvPr id="4" name="TextBox 3"/>
@@ -4048,8 +4048,8 @@
           </a:prstGeom>
         </p:spPr>
       </p:pic>
-      <mc:AlternateContent xmlns:mc="http://schemas.openxmlformats.org/markup-compatibility/2006">
-        <mc:Choice xmlns:a14="http://schemas.microsoft.com/office/drawing/2010/main" Requires="a14">
+      <mc:AlternateContent xmlns:mc="http://schemas.openxmlformats.org/markup-compatibility/2006" xmlns:a14="http://schemas.microsoft.com/office/drawing/2010/main">
+        <mc:Choice Requires="a14">
           <p:sp>
             <p:nvSpPr>
               <p:cNvPr id="6" name="TextBox 5"/>
@@ -4084,7 +4084,7 @@
                     <m:sSub>
                       <m:sSubPr>
                         <m:ctrlPr>
-                          <a:rPr lang="en-US" sz="1100" b="1" i="0" baseline="0" dirty="0" smtClean="0">
+                          <a:rPr lang="en-US" sz="1100" b="1" i="0" baseline="0" dirty="0">
                             <a:latin typeface="Cambria Math" panose="02040503050406030204" pitchFamily="18" charset="0"/>
                           </a:rPr>
                         </m:ctrlPr>
@@ -4134,7 +4134,7 @@
             </p:txBody>
           </p:sp>
         </mc:Choice>
-        <mc:Fallback>
+        <mc:Fallback xmlns="">
           <p:sp>
             <p:nvSpPr>
               <p:cNvPr id="6" name="TextBox 5"/>
@@ -4198,8 +4198,8 @@
           <a:chExt cx="0" cy="0"/>
         </a:xfrm>
       </p:grpSpPr>
-      <mc:AlternateContent xmlns:mc="http://schemas.openxmlformats.org/markup-compatibility/2006">
-        <mc:Choice xmlns:a14="http://schemas.microsoft.com/office/drawing/2010/main" Requires="a14">
+      <mc:AlternateContent xmlns:mc="http://schemas.openxmlformats.org/markup-compatibility/2006" xmlns:a14="http://schemas.microsoft.com/office/drawing/2010/main">
+        <mc:Choice Requires="a14">
           <p:sp>
             <p:nvSpPr>
               <p:cNvPr id="2" name="TextBox 1"/>
@@ -4233,7 +4233,7 @@
                     <m:sSub>
                       <m:sSubPr>
                         <m:ctrlPr>
-                          <a:rPr lang="en-US" sz="2000" b="1" i="0" baseline="0" dirty="0" smtClean="0">
+                          <a:rPr lang="en-US" sz="2000" b="1" i="1" baseline="0" dirty="0">
                             <a:latin typeface="Cambria Math" panose="02040503050406030204" pitchFamily="18" charset="0"/>
                           </a:rPr>
                         </m:ctrlPr>
@@ -4280,7 +4280,7 @@
                     <m:sSub>
                       <m:sSubPr>
                         <m:ctrlPr>
-                          <a:rPr lang="en-US" sz="2000" b="1" i="0" baseline="0" dirty="0" smtClean="0">
+                          <a:rPr lang="en-US" sz="2000" b="1" i="0" baseline="0" dirty="0">
                             <a:latin typeface="Cambria Math" panose="02040503050406030204" pitchFamily="18" charset="0"/>
                           </a:rPr>
                         </m:ctrlPr>
@@ -4311,7 +4311,7 @@
             </p:txBody>
           </p:sp>
         </mc:Choice>
-        <mc:Fallback>
+        <mc:Fallback xmlns="">
           <p:sp>
             <p:nvSpPr>
               <p:cNvPr id="2" name="TextBox 1"/>
@@ -4350,8 +4350,8 @@
           </p:sp>
         </mc:Fallback>
       </mc:AlternateContent>
-      <mc:AlternateContent xmlns:mc="http://schemas.openxmlformats.org/markup-compatibility/2006">
-        <mc:Choice xmlns:a14="http://schemas.microsoft.com/office/drawing/2010/main" Requires="a14">
+      <mc:AlternateContent xmlns:mc="http://schemas.openxmlformats.org/markup-compatibility/2006" xmlns:a14="http://schemas.microsoft.com/office/drawing/2010/main">
+        <mc:Choice Requires="a14">
           <p:sp>
             <p:nvSpPr>
               <p:cNvPr id="3" name="TextBox 2"/>
@@ -4385,7 +4385,7 @@
                     <m:sSub>
                       <m:sSubPr>
                         <m:ctrlPr>
-                          <a:rPr lang="en-US" sz="1000" b="0" i="0" baseline="0" dirty="0" smtClean="0">
+                          <a:rPr lang="en-US" sz="1000" b="0" i="0" baseline="0" dirty="0">
                             <a:latin typeface="Cambria Math" panose="02040503050406030204" pitchFamily="18" charset="0"/>
                           </a:rPr>
                         </m:ctrlPr>
@@ -4590,7 +4590,7 @@
             </p:txBody>
           </p:sp>
         </mc:Choice>
-        <mc:Fallback>
+        <mc:Fallback xmlns="">
           <p:sp>
             <p:nvSpPr>
               <p:cNvPr id="3" name="TextBox 2"/>
@@ -4629,8 +4629,8 @@
           </p:sp>
         </mc:Fallback>
       </mc:AlternateContent>
-      <mc:AlternateContent xmlns:mc="http://schemas.openxmlformats.org/markup-compatibility/2006">
-        <mc:Choice xmlns:a14="http://schemas.microsoft.com/office/drawing/2010/main" Requires="a14">
+      <mc:AlternateContent xmlns:mc="http://schemas.openxmlformats.org/markup-compatibility/2006" xmlns:a14="http://schemas.microsoft.com/office/drawing/2010/main">
+        <mc:Choice Requires="a14">
           <p:sp>
             <p:nvSpPr>
               <p:cNvPr id="4" name="TextBox 3"/>
@@ -4670,7 +4670,7 @@
                     <m:sSub>
                       <m:sSubPr>
                         <m:ctrlPr>
-                          <a:rPr lang="en-US" sz="1000" b="0" i="0" baseline="0" dirty="0" smtClean="0">
+                          <a:rPr lang="en-US" sz="1000" b="0" i="1" baseline="0" dirty="0">
                             <a:latin typeface="Cambria Math" panose="02040503050406030204" pitchFamily="18" charset="0"/>
                           </a:rPr>
                         </m:ctrlPr>
@@ -4792,7 +4792,7 @@
                     <m:sSub>
                       <m:sSubPr>
                         <m:ctrlPr>
-                          <a:rPr lang="en-US" sz="1000" b="0" i="0" baseline="0" dirty="0" smtClean="0">
+                          <a:rPr lang="en-US" sz="1000" b="0" i="1" baseline="0" dirty="0">
                             <a:latin typeface="Cambria Math" panose="02040503050406030204" pitchFamily="18" charset="0"/>
                           </a:rPr>
                         </m:ctrlPr>
@@ -4845,7 +4845,7 @@
                     <m:sSub>
                       <m:sSubPr>
                         <m:ctrlPr>
-                          <a:rPr lang="en-US" sz="1000" b="0" i="0" baseline="0" dirty="0" smtClean="0">
+                          <a:rPr lang="en-US" sz="1000" b="0" i="1" baseline="0" dirty="0">
                             <a:latin typeface="Cambria Math" panose="02040503050406030204" pitchFamily="18" charset="0"/>
                           </a:rPr>
                         </m:ctrlPr>
@@ -4947,7 +4947,7 @@
                     <m:sSub>
                       <m:sSubPr>
                         <m:ctrlPr>
-                          <a:rPr lang="en-US" sz="1000" b="0" i="0" baseline="0" dirty="0" smtClean="0">
+                          <a:rPr lang="en-US" sz="1000" b="0" i="1" baseline="0" dirty="0">
                             <a:latin typeface="Cambria Math" panose="02040503050406030204" pitchFamily="18" charset="0"/>
                           </a:rPr>
                         </m:ctrlPr>
@@ -4994,7 +4994,7 @@
                     <m:sSub>
                       <m:sSubPr>
                         <m:ctrlPr>
-                          <a:rPr lang="en-US" sz="1000" b="0" i="0" baseline="0" dirty="0" smtClean="0">
+                          <a:rPr lang="en-US" sz="1000" b="0" i="0" baseline="0" dirty="0">
                             <a:latin typeface="Cambria Math" panose="02040503050406030204" pitchFamily="18" charset="0"/>
                           </a:rPr>
                         </m:ctrlPr>
@@ -5043,7 +5043,7 @@
                     <m:sSub>
                       <m:sSubPr>
                         <m:ctrlPr>
-                          <a:rPr lang="en-US" sz="1000" b="0" i="0" baseline="0" dirty="0" smtClean="0">
+                          <a:rPr lang="en-US" sz="1000" b="0" i="1" baseline="0" dirty="0">
                             <a:latin typeface="Cambria Math" panose="02040503050406030204" pitchFamily="18" charset="0"/>
                           </a:rPr>
                         </m:ctrlPr>
@@ -5096,7 +5096,7 @@
                     <m:sSub>
                       <m:sSubPr>
                         <m:ctrlPr>
-                          <a:rPr lang="en-US" sz="1000" b="0" i="0" baseline="0" dirty="0" smtClean="0">
+                          <a:rPr lang="en-US" sz="1000" b="0" i="0" baseline="0" dirty="0">
                             <a:latin typeface="Cambria Math" panose="02040503050406030204" pitchFamily="18" charset="0"/>
                           </a:rPr>
                         </m:ctrlPr>
@@ -5136,7 +5136,7 @@
             </p:txBody>
           </p:sp>
         </mc:Choice>
-        <mc:Fallback>
+        <mc:Fallback xmlns="">
           <p:sp>
             <p:nvSpPr>
               <p:cNvPr id="4" name="TextBox 3"/>
@@ -5199,8 +5199,8 @@
           </a:prstGeom>
         </p:spPr>
       </p:pic>
-      <mc:AlternateContent xmlns:mc="http://schemas.openxmlformats.org/markup-compatibility/2006">
-        <mc:Choice xmlns:a14="http://schemas.microsoft.com/office/drawing/2010/main" Requires="a14">
+      <mc:AlternateContent xmlns:mc="http://schemas.openxmlformats.org/markup-compatibility/2006" xmlns:a14="http://schemas.microsoft.com/office/drawing/2010/main">
+        <mc:Choice Requires="a14">
           <p:sp>
             <p:nvSpPr>
               <p:cNvPr id="6" name="TextBox 5"/>
@@ -5235,7 +5235,7 @@
                     <m:sSub>
                       <m:sSubPr>
                         <m:ctrlPr>
-                          <a:rPr lang="en-US" sz="1100" b="1" i="0" baseline="0" dirty="0" smtClean="0">
+                          <a:rPr lang="en-US" sz="1100" b="1" i="1" baseline="0" dirty="0">
                             <a:latin typeface="Cambria Math" panose="02040503050406030204" pitchFamily="18" charset="0"/>
                           </a:rPr>
                         </m:ctrlPr>
@@ -5282,7 +5282,7 @@
                     <m:sSub>
                       <m:sSubPr>
                         <m:ctrlPr>
-                          <a:rPr lang="en-US" sz="1100" b="1" i="0" baseline="0" dirty="0" smtClean="0">
+                          <a:rPr lang="en-US" sz="1100" b="1" i="0" baseline="0" dirty="0">
                             <a:latin typeface="Cambria Math" panose="02040503050406030204" pitchFamily="18" charset="0"/>
                           </a:rPr>
                         </m:ctrlPr>
@@ -5316,7 +5316,7 @@
             </p:txBody>
           </p:sp>
         </mc:Choice>
-        <mc:Fallback>
+        <mc:Fallback xmlns="">
           <p:sp>
             <p:nvSpPr>
               <p:cNvPr id="6" name="TextBox 5"/>
